--- a/Presentation ISPM.pptx
+++ b/Presentation ISPM.pptx
@@ -11367,7 +11367,29 @@
                 <a:ea typeface="Calibri" pitchFamily="34" charset="-122"/>
                 <a:cs typeface="Calibri" pitchFamily="34" charset="-120"/>
               </a:rPr>
-              <a:t>Fagarasan, C., Popa, O., Pisla, A. &amp; Cristea, C. 2021, 'Agile, waterfall and iterative approach in information technology projects', IOP Conference Series: Materials Science and Engineering, vol. 1169, no. 1.</a:t>
+              <a:t>1. </a:t>
+            </a:r>
+            <a:r>
+              <a:rPr lang="en-US" sz="1467" dirty="0" err="1">
+                <a:solidFill>
+                  <a:srgbClr val="002060"/>
+                </a:solidFill>
+                <a:latin typeface="Calibri" pitchFamily="34" charset="0"/>
+                <a:ea typeface="Calibri" pitchFamily="34" charset="-122"/>
+                <a:cs typeface="Calibri" pitchFamily="34" charset="-120"/>
+              </a:rPr>
+              <a:t>Fagarasan</a:t>
+            </a:r>
+            <a:r>
+              <a:rPr lang="en-US" sz="1467" dirty="0">
+                <a:solidFill>
+                  <a:srgbClr val="002060"/>
+                </a:solidFill>
+                <a:latin typeface="Calibri" pitchFamily="34" charset="0"/>
+                <a:ea typeface="Calibri" pitchFamily="34" charset="-122"/>
+                <a:cs typeface="Calibri" pitchFamily="34" charset="-120"/>
+              </a:rPr>
+              <a:t>, C., Popa, O., Pisla, A. &amp; Cristea, C. 2021, 'Agile, waterfall and iterative approach in information technology projects', IOP Conference Series: Materials Science and Engineering, vol. 1169, no. 1.</a:t>
             </a:r>
           </a:p>
           <a:p>
@@ -11431,7 +11453,7 @@
                 <a:ea typeface="Calibri" pitchFamily="34" charset="-122"/>
                 <a:cs typeface="Calibri" pitchFamily="34" charset="-120"/>
               </a:rPr>
-              <a:t>Ghena, M.F. &amp; Ghiculescu, L.D. 2023, 'Applicability of Waterfall and Agile Methodologies', FAIMA Business &amp; Management Journal, vol. 11, no. 4, pp. 55–65.</a:t>
+              <a:t>2. Ghena, M.F. &amp; Ghiculescu, L.D. 2023, 'Applicability of Waterfall and Agile Methodologies', FAIMA Business &amp; Management Journal, vol. 11, no. 4, pp. 55–65.</a:t>
             </a:r>
             <a:r>
               <a:rPr lang="en-US" sz="1467" dirty="0">

--- a/Presentation ISPM.pptx
+++ b/Presentation ISPM.pptx
@@ -10428,7 +10428,7 @@
                 <a:ea typeface="Cambria" pitchFamily="34" charset="-122"/>
                 <a:cs typeface="Cambria" pitchFamily="34" charset="-120"/>
               </a:rPr>
-              <a:t>Ghena &amp; Ghiculescu (2023)</a:t>
+              <a:t>Ghena et al. (2023)</a:t>
             </a:r>
             <a:endParaRPr lang="en-US" sz="2667" dirty="0"/>
           </a:p>
